--- a/Document/GDELT presentation.pptx
+++ b/Document/GDELT presentation.pptx
@@ -104,6 +104,11 @@
       </a:defRPr>
     </a:lvl9pPr>
   </p:defaultTextStyle>
+  <p:extLst>
+    <p:ext uri="{EFAFB233-063F-42B5-8137-9DF3F51BA10A}">
+      <p15:sldGuideLst xmlns:p15="http://schemas.microsoft.com/office/powerpoint/2012/main"/>
+    </p:ext>
+  </p:extLst>
 </p:presentation>
 </file>
 
@@ -256,7 +261,7 @@
           <a:p>
             <a:fld id="{C0B5AD5C-8BDD-174A-A80E-A197428A0F3C}" type="datetimeFigureOut">
               <a:rPr lang="en-TH" smtClean="0"/>
-              <a:t>25/6/2026 R</a:t>
+              <a:t>28/6/2026 R</a:t>
             </a:fld>
             <a:endParaRPr lang="en-TH"/>
           </a:p>
@@ -456,7 +461,7 @@
           <a:p>
             <a:fld id="{C0B5AD5C-8BDD-174A-A80E-A197428A0F3C}" type="datetimeFigureOut">
               <a:rPr lang="en-TH" smtClean="0"/>
-              <a:t>25/6/2026 R</a:t>
+              <a:t>28/6/2026 R</a:t>
             </a:fld>
             <a:endParaRPr lang="en-TH"/>
           </a:p>
@@ -666,7 +671,7 @@
           <a:p>
             <a:fld id="{C0B5AD5C-8BDD-174A-A80E-A197428A0F3C}" type="datetimeFigureOut">
               <a:rPr lang="en-TH" smtClean="0"/>
-              <a:t>25/6/2026 R</a:t>
+              <a:t>28/6/2026 R</a:t>
             </a:fld>
             <a:endParaRPr lang="en-TH"/>
           </a:p>
@@ -866,7 +871,7 @@
           <a:p>
             <a:fld id="{C0B5AD5C-8BDD-174A-A80E-A197428A0F3C}" type="datetimeFigureOut">
               <a:rPr lang="en-TH" smtClean="0"/>
-              <a:t>25/6/2026 R</a:t>
+              <a:t>28/6/2026 R</a:t>
             </a:fld>
             <a:endParaRPr lang="en-TH"/>
           </a:p>
@@ -1142,7 +1147,7 @@
           <a:p>
             <a:fld id="{C0B5AD5C-8BDD-174A-A80E-A197428A0F3C}" type="datetimeFigureOut">
               <a:rPr lang="en-TH" smtClean="0"/>
-              <a:t>25/6/2026 R</a:t>
+              <a:t>28/6/2026 R</a:t>
             </a:fld>
             <a:endParaRPr lang="en-TH"/>
           </a:p>
@@ -1410,7 +1415,7 @@
           <a:p>
             <a:fld id="{C0B5AD5C-8BDD-174A-A80E-A197428A0F3C}" type="datetimeFigureOut">
               <a:rPr lang="en-TH" smtClean="0"/>
-              <a:t>25/6/2026 R</a:t>
+              <a:t>28/6/2026 R</a:t>
             </a:fld>
             <a:endParaRPr lang="en-TH"/>
           </a:p>
@@ -1825,7 +1830,7 @@
           <a:p>
             <a:fld id="{C0B5AD5C-8BDD-174A-A80E-A197428A0F3C}" type="datetimeFigureOut">
               <a:rPr lang="en-TH" smtClean="0"/>
-              <a:t>25/6/2026 R</a:t>
+              <a:t>28/6/2026 R</a:t>
             </a:fld>
             <a:endParaRPr lang="en-TH"/>
           </a:p>
@@ -1967,7 +1972,7 @@
           <a:p>
             <a:fld id="{C0B5AD5C-8BDD-174A-A80E-A197428A0F3C}" type="datetimeFigureOut">
               <a:rPr lang="en-TH" smtClean="0"/>
-              <a:t>25/6/2026 R</a:t>
+              <a:t>28/6/2026 R</a:t>
             </a:fld>
             <a:endParaRPr lang="en-TH"/>
           </a:p>
@@ -2080,7 +2085,7 @@
           <a:p>
             <a:fld id="{C0B5AD5C-8BDD-174A-A80E-A197428A0F3C}" type="datetimeFigureOut">
               <a:rPr lang="en-TH" smtClean="0"/>
-              <a:t>25/6/2026 R</a:t>
+              <a:t>28/6/2026 R</a:t>
             </a:fld>
             <a:endParaRPr lang="en-TH"/>
           </a:p>
@@ -2393,7 +2398,7 @@
           <a:p>
             <a:fld id="{C0B5AD5C-8BDD-174A-A80E-A197428A0F3C}" type="datetimeFigureOut">
               <a:rPr lang="en-TH" smtClean="0"/>
-              <a:t>25/6/2026 R</a:t>
+              <a:t>28/6/2026 R</a:t>
             </a:fld>
             <a:endParaRPr lang="en-TH"/>
           </a:p>
@@ -2682,7 +2687,7 @@
           <a:p>
             <a:fld id="{C0B5AD5C-8BDD-174A-A80E-A197428A0F3C}" type="datetimeFigureOut">
               <a:rPr lang="en-TH" smtClean="0"/>
-              <a:t>25/6/2026 R</a:t>
+              <a:t>28/6/2026 R</a:t>
             </a:fld>
             <a:endParaRPr lang="en-TH"/>
           </a:p>
@@ -2925,7 +2930,7 @@
           <a:p>
             <a:fld id="{C0B5AD5C-8BDD-174A-A80E-A197428A0F3C}" type="datetimeFigureOut">
               <a:rPr lang="en-TH" smtClean="0"/>
-              <a:t>25/6/2026 R</a:t>
+              <a:t>28/6/2026 R</a:t>
             </a:fld>
             <a:endParaRPr lang="en-TH"/>
           </a:p>
@@ -3432,7 +3437,7 @@
                   <a:schemeClr val="bg1"/>
                 </a:solidFill>
               </a:rPr>
-              <a:t>GDELT API vs BigQuery</a:t>
+              <a:t>GDELT</a:t>
             </a:r>
           </a:p>
         </p:txBody>
@@ -3456,7 +3461,7 @@
         <p:spPr>
           <a:xfrm>
             <a:off x="312683" y="1207760"/>
-            <a:ext cx="6273800" cy="2300507"/>
+            <a:ext cx="6273800" cy="2664654"/>
           </a:xfrm>
         </p:spPr>
         <p:txBody>
@@ -3500,13 +3505,6 @@
             </a:r>
           </a:p>
           <a:p>
-            <a:pPr marL="0" indent="0">
-              <a:buNone/>
-            </a:pPr>
-            <a:r>
-              <a:rPr lang="en-TH" sz="1200" dirty="0"/>
-              <a:t>GDELT helps provide </a:t>
-            </a:r>
             <a:r>
               <a:rPr lang="en-TH" sz="1200" b="1" dirty="0"/>
               <a:t>timeline tone </a:t>
@@ -3521,7 +3519,13 @@
             </a:r>
             <a:r>
               <a:rPr lang="en-TH" sz="1200" dirty="0"/>
-              <a:t> (coverage) of the news regards the keywords given. In this case, we will be focus mainly on </a:t>
+              <a:t> (coverage) of the news regards the keywords given.</a:t>
+            </a:r>
+          </a:p>
+          <a:p>
+            <a:r>
+              <a:rPr lang="en-TH" sz="1200" dirty="0"/>
+              <a:t>Comparing </a:t>
             </a:r>
             <a:r>
               <a:rPr lang="en-TH" sz="1200" b="1" dirty="0"/>
@@ -3545,7 +3549,13 @@
             </a:r>
             <a:r>
               <a:rPr lang="en-TH" sz="1200" dirty="0"/>
-              <a:t>from its own baseline (upto 52 weeks of data) to see whether the current week’s z-score of each sector is improving by how much. With the most improved topic, we can later use the topic to filter for companies in Companies House with SIC code to focus.</a:t>
+              <a:t>from its own baseline (upto 52 weeks of data)</a:t>
+            </a:r>
+          </a:p>
+          <a:p>
+            <a:r>
+              <a:rPr lang="en-TH" sz="1200" dirty="0"/>
+              <a:t>With most improved topics, we can later use the topic to filter for companies in Companies House with SIC code to focus.</a:t>
             </a:r>
           </a:p>
         </p:txBody>
@@ -3606,36 +3616,6 @@
           </a:p>
         </p:txBody>
       </p:sp>
-      <p:pic>
-        <p:nvPicPr>
-          <p:cNvPr id="7" name="Picture 6">
-            <a:extLst>
-              <a:ext uri="{FF2B5EF4-FFF2-40B4-BE49-F238E27FC236}">
-                <a16:creationId xmlns:a16="http://schemas.microsoft.com/office/drawing/2014/main" id="{72A5083A-03AC-0157-EBB8-7CA736D2253A}"/>
-              </a:ext>
-            </a:extLst>
-          </p:cNvPr>
-          <p:cNvPicPr>
-            <a:picLocks noChangeAspect="1"/>
-          </p:cNvPicPr>
-          <p:nvPr/>
-        </p:nvPicPr>
-        <p:blipFill>
-          <a:blip r:embed="rId2"/>
-          <a:stretch>
-            <a:fillRect/>
-          </a:stretch>
-        </p:blipFill>
-        <p:spPr>
-          <a:xfrm>
-            <a:off x="312683" y="3762100"/>
-            <a:ext cx="6273800" cy="2476500"/>
-          </a:xfrm>
-          <a:prstGeom prst="rect">
-            <a:avLst/>
-          </a:prstGeom>
-        </p:spPr>
-      </p:pic>
       <p:cxnSp>
         <p:nvCxnSpPr>
           <p:cNvPr id="9" name="Straight Connector 8">
@@ -3884,7 +3864,11 @@
               <a:buAutoNum type="arabicPeriod"/>
             </a:pPr>
             <a:r>
-              <a:rPr lang="en-TH" sz="1200" b="1" dirty="0"/>
+              <a:rPr lang="en-TH" sz="1200" b="1" dirty="0">
+                <a:solidFill>
+                  <a:srgbClr val="00B050"/>
+                </a:solidFill>
+              </a:rPr>
               <a:t>Unreliability of GDELT API </a:t>
             </a:r>
             <a:r>
@@ -3898,7 +3882,11 @@
               <a:buAutoNum type="arabicPeriod"/>
             </a:pPr>
             <a:r>
-              <a:rPr lang="en-TH" sz="1200" b="1" dirty="0"/>
+              <a:rPr lang="en-TH" sz="1200" b="1" dirty="0">
+                <a:solidFill>
+                  <a:srgbClr val="00B050"/>
+                </a:solidFill>
+              </a:rPr>
               <a:t>BigQuery free tier cap </a:t>
             </a:r>
             <a:r>
@@ -3912,7 +3900,13 @@
               <a:buAutoNum type="arabicPeriod"/>
             </a:pPr>
             <a:r>
-              <a:rPr lang="en-TH" sz="1200" b="1" dirty="0"/>
+              <a:rPr lang="en-TH" sz="1200" b="1" dirty="0">
+                <a:solidFill>
+                  <a:schemeClr val="bg2">
+                    <a:lumMod val="50000"/>
+                  </a:schemeClr>
+                </a:solidFill>
+              </a:rPr>
               <a:t>Defining regions (locality) of the news </a:t>
             </a:r>
             <a:r>
@@ -3926,7 +3920,13 @@
               <a:buAutoNum type="arabicPeriod"/>
             </a:pPr>
             <a:r>
-              <a:rPr lang="en-TH" sz="1200" b="1" dirty="0"/>
+              <a:rPr lang="en-TH" sz="1200" b="1" dirty="0">
+                <a:solidFill>
+                  <a:schemeClr val="bg2">
+                    <a:lumMod val="50000"/>
+                  </a:schemeClr>
+                </a:solidFill>
+              </a:rPr>
               <a:t>Accuracy of GDELT information </a:t>
             </a:r>
             <a:r>
@@ -3962,6 +3962,36 @@
           </a:p>
         </p:txBody>
       </p:sp>
+      <p:pic>
+        <p:nvPicPr>
+          <p:cNvPr id="5" name="Picture 4">
+            <a:extLst>
+              <a:ext uri="{FF2B5EF4-FFF2-40B4-BE49-F238E27FC236}">
+                <a16:creationId xmlns:a16="http://schemas.microsoft.com/office/drawing/2014/main" id="{81C4FE05-0049-6C26-9168-B349775141E7}"/>
+              </a:ext>
+            </a:extLst>
+          </p:cNvPr>
+          <p:cNvPicPr>
+            <a:picLocks noChangeAspect="1"/>
+          </p:cNvPicPr>
+          <p:nvPr/>
+        </p:nvPicPr>
+        <p:blipFill>
+          <a:blip r:embed="rId2"/>
+          <a:stretch>
+            <a:fillRect/>
+          </a:stretch>
+        </p:blipFill>
+        <p:spPr>
+          <a:xfrm>
+            <a:off x="312683" y="3872414"/>
+            <a:ext cx="6442840" cy="2309474"/>
+          </a:xfrm>
+          <a:prstGeom prst="rect">
+            <a:avLst/>
+          </a:prstGeom>
+        </p:spPr>
+      </p:pic>
     </p:spTree>
     <p:extLst>
       <p:ext uri="{BB962C8B-B14F-4D97-AF65-F5344CB8AC3E}">
